--- a/test/pptx/footer/basic/output.pptx
+++ b/test/pptx/footer/basic/output.pptx
@@ -550,6 +550,9 @@
       </p:sp>
     </p:spTree>
   </p:cSld>
+  <p:clrMapOvr>
+    <a:masterClrMapping/>
+  </p:clrMapOvr>
 </p:notes>
 </file>
 
